--- a/docs/Documentacao-Tecnica-Cidades-ESG.pptx
+++ b/docs/Documentacao-Tecnica-Cidades-ESG.pptx
@@ -124,32 +124,32 @@
   <p:extLst>
     <p:ext uri="{521415D9-36F7-43E2-AB2F-B90AF26B5E84}">
       <p14:sectionLst xmlns:p14="http://schemas.microsoft.com/office/powerpoint/2010/main">
-        <p14:section name="Abertura" id="{48cdff99-3022-a5c5-b98b-7df5cfeddd9b}">
+        <p14:section name="Abertura" id="{ba845f71-deb9-9b58-6ed8-0a51637d97bb}">
           <p14:sldIdLst>
             <p14:sldId id="256"/>
           </p14:sldIdLst>
         </p14:section>
-        <p14:section name="Projeto e arquitetura" id="{5a239663-61bb-cf56-9c92-47465cf8d710}">
+        <p14:section name="Projeto e arquitetura" id="{df9b6535-9b1e-196d-df01-9b3259061733}">
           <p14:sldIdLst>
             <p14:sldId id="257"/>
             <p14:sldId id="258"/>
           </p14:sldIdLst>
         </p14:section>
-        <p14:section name="Pipeline CI/CD" id="{ca4e2b0d-9afe-34b5-0bac-5986c924fd79}">
+        <p14:section name="Pipeline CI/CD" id="{ce1d3f73-2d55-86db-608a-ff394a090154}">
           <p14:sldIdLst>
             <p14:sldId id="259"/>
             <p14:sldId id="260"/>
             <p14:sldId id="261"/>
           </p14:sldIdLst>
         </p14:section>
-        <p14:section name="Docker" id="{78c29a59-4fc7-ec3e-9293-d14f96e4abc3}">
+        <p14:section name="Docker" id="{c3724296-68bd-751d-67e9-f171573f9055}">
           <p14:sldIdLst>
             <p14:sldId id="262"/>
             <p14:sldId id="263"/>
             <p14:sldId id="264"/>
           </p14:sldIdLst>
         </p14:section>
-        <p14:section name="Evidências" id="{cb11228b-22af-1dce-6244-7546f204a614}">
+        <p14:section name="Evidências" id="{c4d9af03-1d23-4a14-36eb-69b7c8cad839}">
           <p14:sldIdLst>
             <p14:sldId id="265"/>
             <p14:sldId id="266"/>
@@ -159,13 +159,13 @@
             <p14:sldId id="270"/>
           </p14:sldIdLst>
         </p14:section>
-        <p14:section name="Desafios e checklist" id="{28a4f420-dc10-0088-a253-4d61233fef6d}">
+        <p14:section name="Desafios e checklist" id="{24da6c9a-cb0b-5c74-7d89-02321f282dca}">
           <p14:sldIdLst>
             <p14:sldId id="271"/>
             <p14:sldId id="272"/>
           </p14:sldIdLst>
         </p14:section>
-        <p14:section name="Encerramento" id="{dd0bd5d3-26a2-f9b5-fe16-c26028c6615b}">
+        <p14:section name="Encerramento" id="{15323059-0335-255a-a390-443ec9c6f073}">
           <p14:sldIdLst>
             <p14:sldId id="273"/>
           </p14:sldIdLst>
@@ -938,8 +938,7 @@
           <a:p>
             <a:r>
               <a:rPr lang="en-US" dirty="0"/>
-              <a:t>Evidência das etapas de build: grafo completo da execução e detalhe do job de build.
-Para inserir o print: clique com o botão direito na imagem &gt; Alterar imagem &gt; selecione o arquivo. O tamanho e a posição são mantidos.</a:t>
+              <a:t>Execução #3 do pipeline (commit 6677280), disparada por push na main: Build, Testes, Docker, Deploy Staging e Deploy Produção concluídos. À direita, os passos do job de build.</a:t>
             </a:r>
             <a:endParaRPr lang="en-US" dirty="0"/>
           </a:p>
@@ -1027,8 +1026,7 @@
           <a:p>
             <a:r>
               <a:rPr lang="en-US" dirty="0"/>
-              <a:t>Evidência dos testes automatizados e da validação da imagem e do Compose dentro do pipeline.
-Para inserir o print: clique com o botão direito na imagem &gt; Alterar imagem &gt; selecione o arquivo. O tamanho e a posição são mantidos.</a:t>
+              <a:t>O job Testes roda os 40 testes unitários e os 4 de integração contra um PostgreSQL real. O job Docker constrói a imagem, sobe aplicação e banco com o Compose, roda os smoke tests e publica a imagem no GitHub Container Registry.</a:t>
             </a:r>
             <a:endParaRPr lang="en-US" dirty="0"/>
           </a:p>
@@ -1116,8 +1114,7 @@
           <a:p>
             <a:r>
               <a:rPr lang="en-US" dirty="0"/>
-              <a:t>Evidência do deploy automatizado em staging e do controle de aprovação antes de produção.
-Para inserir o print: clique com o botão direito na imagem &gt; Alterar imagem &gt; selecione o arquivo. O tamanho e a posição são mantidos.</a:t>
+              <a:t>O deploy em staging só termina quando /api/info responde com o commit da execução; depois rodam os smoke tests. O ambiente production do GitHub exige a aprovação de um revisor.</a:t>
             </a:r>
             <a:endParaRPr lang="en-US" dirty="0"/>
           </a:p>
@@ -1205,8 +1202,7 @@
           <a:p>
             <a:r>
               <a:rPr lang="en-US" dirty="0"/>
-              <a:t>Evidência do deploy em produção e da imagem versionada no GitHub Container Registry.
-Para inserir o print: clique com o botão direito na imagem &gt; Alterar imagem &gt; selecione o arquivo. O tamanho e a posição são mantidos.</a:t>
+              <a:t>Após a aprovação, o mesmo commit validado em staging foi publicado em produção. A imagem versionada fica no GitHub Container Registry, com a tag do commit.</a:t>
             </a:r>
             <a:endParaRPr lang="en-US" dirty="0"/>
           </a:p>
@@ -1294,8 +1290,7 @@
           <a:p>
             <a:r>
               <a:rPr lang="en-US" dirty="0"/>
-              <a:t>Evidência dos dois ambientes no ar. A cor da faixa identifica o ambiente; versão e commit mostram que ambos rodam a mesma versão.
-Para inserir o print: clique com o botão direito na imagem &gt; Alterar imagem &gt; selecione o arquivo. O tamanho e a posição são mantidos.</a:t>
+              <a:t>Os dois ambientes no ar no Render. A cor da faixa identifica o ambiente; versão e commit mostram que staging e produção rodam exatamente a mesma versão, com o banco conectado.</a:t>
             </a:r>
             <a:endParaRPr lang="en-US" dirty="0"/>
           </a:p>
@@ -1383,8 +1378,7 @@
           <a:p>
             <a:r>
               <a:rPr lang="en-US" dirty="0"/>
-              <a:t>Evidência da infraestrutura criada pelo render.yaml e da execução local com Docker Compose.
-Para inserir o print: clique com o botão direito na imagem &gt; Alterar imagem &gt; selecione o arquivo. O tamanho e a posição são mantidos.</a:t>
+              <a:t>À esquerda, os recursos criados pelo Blueprint render.yaml. À direita, o docker compose up executado no pipeline: cria as duas redes e os dois volumes, sobe o banco e a aplicação e espera os health checks.</a:t>
             </a:r>
             <a:endParaRPr lang="en-US" dirty="0"/>
           </a:p>
@@ -1648,7 +1642,7 @@
           <a:p>
             <a:r>
               <a:rPr lang="en-US" dirty="0"/>
-              <a:t>Substitua os links [PREENCHER] pelas URLs reais do repositório e dos serviços no Render.</a:t>
+              <a:t>Links do repositório e dos dois ambientes no Render. No plano gratuito, o primeiro acesso depois de 15 minutos parado leva cerca de 1 minuto, enquanto o serviço acorda.</a:t>
             </a:r>
             <a:endParaRPr lang="en-US" dirty="0"/>
           </a:p>
@@ -3602,34 +3596,9 @@
           </a:p>
         </p:txBody>
       </p:sp>
-      <p:sp>
-        <p:nvSpPr>
-          <p:cNvPr id="3" name="Shape 1"/>
-          <p:cNvSpPr/>
-          <p:nvPr/>
-        </p:nvSpPr>
-        <p:spPr>
-          <a:xfrm>
-            <a:off x="548640" y="1645920"/>
-            <a:ext cx="5367528" cy="3019235"/>
-          </a:xfrm>
-          <a:prstGeom prst="rect">
-            <a:avLst/>
-          </a:prstGeom>
-          <a:solidFill>
-            <a:schemeClr val="bg2"/>
-          </a:solidFill>
-          <a:ln w="12700">
-            <a:solidFill>
-              <a:srgbClr val="D9E1DC"/>
-            </a:solidFill>
-            <a:prstDash val="solid"/>
-          </a:ln>
-        </p:spPr>
-      </p:sp>
       <p:pic>
         <p:nvPicPr>
-          <p:cNvPr id="4" name="Print: Pipeline completo" descr="Pipeline completo">    </p:cNvPr>
+          <p:cNvPr id="3" name="Print: Pipeline completo" descr="Pipeline completo: Execução #3 na main, commit 6677280: os cinco jobs concluídos com sucesso">    </p:cNvPr>
           <p:cNvPicPr>
             <a:picLocks noChangeAspect="1"/>
           </p:cNvPicPr>
@@ -3643,8 +3612,8 @@
         </p:blipFill>
         <p:spPr>
           <a:xfrm>
-            <a:off x="548640" y="1645920"/>
-            <a:ext cx="5367528" cy="3019235"/>
+            <a:off x="548640" y="1600200"/>
+            <a:ext cx="5367528" cy="2740399"/>
           </a:xfrm>
           <a:prstGeom prst="rect">
             <a:avLst/>
@@ -3653,71 +3622,18 @@
       </p:pic>
       <p:sp>
         <p:nvSpPr>
-          <p:cNvPr id="5" name="Text 2"/>
-          <p:cNvSpPr txBox="1"/>
-          <p:nvPr/>
-        </p:nvSpPr>
-        <p:spPr>
-          <a:xfrm>
-            <a:off x="548640" y="4848035"/>
-            <a:ext cx="5367528" cy="1005840"/>
-          </a:xfrm>
-          <a:prstGeom prst="rect">
-            <a:avLst/>
-          </a:prstGeom>
-          <a:noFill/>
-          <a:ln/>
-        </p:spPr>
-        <p:txBody>
-          <a:bodyPr wrap="square" lIns="0" tIns="0" rIns="0" bIns="0" rtlCol="0" anchor="t"/>
-          <a:lstStyle/>
-          <a:p>
-            <a:pPr indent="0" marL="0">
-              <a:buNone/>
-            </a:pPr>
-            <a:r>
-              <a:rPr lang="en-US" sz="1600" b="1" dirty="0">
-                <a:solidFill>
-                  <a:schemeClr val="tx2"/>
-                </a:solidFill>
-              </a:rPr>
-              <a:t>Pipeline completo</a:t>
-            </a:r>
-            <a:endParaRPr lang="en-US" sz="1400" dirty="0"/>
-          </a:p>
-          <a:p>
-            <a:pPr indent="0" marL="0">
-              <a:buNone/>
-            </a:pPr>
-            <a:r>
-              <a:rPr lang="en-US" sz="1300" dirty="0">
-                <a:solidFill>
-                  <a:schemeClr val="accent5"/>
-                </a:solidFill>
-              </a:rPr>
-              <a:t>GitHub Actions: os cinco jobs concluídos em uma execução na main</a:t>
-            </a:r>
-            <a:endParaRPr lang="en-US" sz="1400" dirty="0"/>
-          </a:p>
-        </p:txBody>
-      </p:sp>
-      <p:sp>
-        <p:nvSpPr>
-          <p:cNvPr id="6" name="Shape 3"/>
+          <p:cNvPr id="4" name="Moldura: Pipeline completo"/>
           <p:cNvSpPr/>
           <p:nvPr/>
         </p:nvSpPr>
         <p:spPr>
           <a:xfrm>
-            <a:off x="6272784" y="1645920"/>
-            <a:ext cx="5367528" cy="3019235"/>
-          </a:xfrm>
-          <a:prstGeom prst="rect">
-            <a:avLst/>
-          </a:prstGeom>
-          <a:solidFill>
-            <a:schemeClr val="bg2"/>
-          </a:solidFill>
+            <a:off x="548640" y="1600200"/>
+            <a:ext cx="5367528" cy="2740399"/>
+          </a:xfrm>
+          <a:prstGeom prst="rect">
+            <a:avLst/>
+          </a:prstGeom>
           <a:ln w="12700">
             <a:solidFill>
               <a:srgbClr val="D9E1DC"/>
@@ -3726,9 +3642,59 @@
           </a:ln>
         </p:spPr>
       </p:sp>
+      <p:sp>
+        <p:nvSpPr>
+          <p:cNvPr id="5" name="Text 2"/>
+          <p:cNvSpPr txBox="1"/>
+          <p:nvPr/>
+        </p:nvSpPr>
+        <p:spPr>
+          <a:xfrm>
+            <a:off x="548640" y="4802315"/>
+            <a:ext cx="5367528" cy="1005840"/>
+          </a:xfrm>
+          <a:prstGeom prst="rect">
+            <a:avLst/>
+          </a:prstGeom>
+          <a:noFill/>
+          <a:ln/>
+        </p:spPr>
+        <p:txBody>
+          <a:bodyPr wrap="square" lIns="0" tIns="0" rIns="0" bIns="0" rtlCol="0" anchor="t"/>
+          <a:lstStyle/>
+          <a:p>
+            <a:pPr indent="0" marL="0">
+              <a:buNone/>
+            </a:pPr>
+            <a:r>
+              <a:rPr lang="en-US" sz="1600" b="1" dirty="0">
+                <a:solidFill>
+                  <a:schemeClr val="tx2"/>
+                </a:solidFill>
+              </a:rPr>
+              <a:t>Pipeline completo</a:t>
+            </a:r>
+            <a:endParaRPr lang="en-US" sz="1400" dirty="0"/>
+          </a:p>
+          <a:p>
+            <a:pPr indent="0" marL="0">
+              <a:buNone/>
+            </a:pPr>
+            <a:r>
+              <a:rPr lang="en-US" sz="1300" dirty="0">
+                <a:solidFill>
+                  <a:schemeClr val="accent5"/>
+                </a:solidFill>
+              </a:rPr>
+              <a:t>Execução #3 na main, commit 6677280: os cinco jobs concluídos com sucesso</a:t>
+            </a:r>
+            <a:endParaRPr lang="en-US" sz="1400" dirty="0"/>
+          </a:p>
+        </p:txBody>
+      </p:sp>
       <p:pic>
         <p:nvPicPr>
-          <p:cNvPr id="7" name="Print: Build" descr="Build">    </p:cNvPr>
+          <p:cNvPr id="6" name="Print: Build" descr="Build: Job Build: Java 21 com cache do Maven, JAR compilado e guardado como artefato">    </p:cNvPr>
           <p:cNvPicPr>
             <a:picLocks noChangeAspect="1"/>
           </p:cNvPicPr>
@@ -3742,14 +3708,36 @@
         </p:blipFill>
         <p:spPr>
           <a:xfrm>
-            <a:off x="6272784" y="1645920"/>
-            <a:ext cx="5367528" cy="3019235"/>
+            <a:off x="6272784" y="1600200"/>
+            <a:ext cx="5367528" cy="2738759"/>
           </a:xfrm>
           <a:prstGeom prst="rect">
             <a:avLst/>
           </a:prstGeom>
         </p:spPr>
       </p:pic>
+      <p:sp>
+        <p:nvSpPr>
+          <p:cNvPr id="7" name="Moldura: Build"/>
+          <p:cNvSpPr/>
+          <p:nvPr/>
+        </p:nvSpPr>
+        <p:spPr>
+          <a:xfrm>
+            <a:off x="6272784" y="1600200"/>
+            <a:ext cx="5367528" cy="2738759"/>
+          </a:xfrm>
+          <a:prstGeom prst="rect">
+            <a:avLst/>
+          </a:prstGeom>
+          <a:ln w="12700">
+            <a:solidFill>
+              <a:srgbClr val="D9E1DC"/>
+            </a:solidFill>
+            <a:prstDash val="solid"/>
+          </a:ln>
+        </p:spPr>
+      </p:sp>
       <p:sp>
         <p:nvSpPr>
           <p:cNvPr id="8" name="Text 4"/>
@@ -3758,7 +3746,7 @@
         </p:nvSpPr>
         <p:spPr>
           <a:xfrm>
-            <a:off x="6272784" y="4848035"/>
+            <a:off x="6272784" y="4802315"/>
             <a:ext cx="5367528" cy="1005840"/>
           </a:xfrm>
           <a:prstGeom prst="rect">
@@ -3794,7 +3782,7 @@
                   <a:schemeClr val="accent5"/>
                 </a:solidFill>
               </a:rPr>
-              <a:t>Job Build: compilação com Maven e o JAR guardado como artefato</a:t>
+              <a:t>Job Build: Java 21 com cache do Maven, JAR compilado e guardado como artefato</a:t>
             </a:r>
             <a:endParaRPr lang="en-US" sz="1400" dirty="0"/>
           </a:p>
@@ -3908,34 +3896,9 @@
           </a:p>
         </p:txBody>
       </p:sp>
-      <p:sp>
-        <p:nvSpPr>
-          <p:cNvPr id="3" name="Shape 1"/>
-          <p:cNvSpPr/>
-          <p:nvPr/>
-        </p:nvSpPr>
-        <p:spPr>
-          <a:xfrm>
-            <a:off x="548640" y="1645920"/>
-            <a:ext cx="5367528" cy="3019235"/>
-          </a:xfrm>
-          <a:prstGeom prst="rect">
-            <a:avLst/>
-          </a:prstGeom>
-          <a:solidFill>
-            <a:schemeClr val="bg2"/>
-          </a:solidFill>
-          <a:ln w="12700">
-            <a:solidFill>
-              <a:srgbClr val="D9E1DC"/>
-            </a:solidFill>
-            <a:prstDash val="solid"/>
-          </a:ln>
-        </p:spPr>
-      </p:sp>
       <p:pic>
         <p:nvPicPr>
-          <p:cNvPr id="4" name="Print: Testes" descr="Testes">    </p:cNvPr>
+          <p:cNvPr id="3" name="Print: Testes" descr="Testes: Testes unitários e de integração com PostgreSQL, relatório publicado e cobertura (JaCoCo)">    </p:cNvPr>
           <p:cNvPicPr>
             <a:picLocks noChangeAspect="1"/>
           </p:cNvPicPr>
@@ -3949,8 +3912,8 @@
         </p:blipFill>
         <p:spPr>
           <a:xfrm>
-            <a:off x="548640" y="1645920"/>
-            <a:ext cx="5367528" cy="3019235"/>
+            <a:off x="548640" y="1600200"/>
+            <a:ext cx="5367528" cy="2674554"/>
           </a:xfrm>
           <a:prstGeom prst="rect">
             <a:avLst/>
@@ -3959,71 +3922,18 @@
       </p:pic>
       <p:sp>
         <p:nvSpPr>
-          <p:cNvPr id="5" name="Text 2"/>
-          <p:cNvSpPr txBox="1"/>
-          <p:nvPr/>
-        </p:nvSpPr>
-        <p:spPr>
-          <a:xfrm>
-            <a:off x="548640" y="4848035"/>
-            <a:ext cx="5367528" cy="1005840"/>
-          </a:xfrm>
-          <a:prstGeom prst="rect">
-            <a:avLst/>
-          </a:prstGeom>
-          <a:noFill/>
-          <a:ln/>
-        </p:spPr>
-        <p:txBody>
-          <a:bodyPr wrap="square" lIns="0" tIns="0" rIns="0" bIns="0" rtlCol="0" anchor="t"/>
-          <a:lstStyle/>
-          <a:p>
-            <a:pPr indent="0" marL="0">
-              <a:buNone/>
-            </a:pPr>
-            <a:r>
-              <a:rPr lang="en-US" sz="1600" b="1" dirty="0">
-                <a:solidFill>
-                  <a:schemeClr val="tx2"/>
-                </a:solidFill>
-              </a:rPr>
-              <a:t>Testes</a:t>
-            </a:r>
-            <a:endParaRPr lang="en-US" sz="1400" dirty="0"/>
-          </a:p>
-          <a:p>
-            <a:pPr indent="0" marL="0">
-              <a:buNone/>
-            </a:pPr>
-            <a:r>
-              <a:rPr lang="en-US" sz="1300" dirty="0">
-                <a:solidFill>
-                  <a:schemeClr val="accent5"/>
-                </a:solidFill>
-              </a:rPr>
-              <a:t>Relatório 'Resultado dos testes' e resumo de cobertura (JaCoCo)</a:t>
-            </a:r>
-            <a:endParaRPr lang="en-US" sz="1400" dirty="0"/>
-          </a:p>
-        </p:txBody>
-      </p:sp>
-      <p:sp>
-        <p:nvSpPr>
-          <p:cNvPr id="6" name="Shape 3"/>
+          <p:cNvPr id="4" name="Moldura: Testes"/>
           <p:cNvSpPr/>
           <p:nvPr/>
         </p:nvSpPr>
         <p:spPr>
           <a:xfrm>
-            <a:off x="6272784" y="1645920"/>
-            <a:ext cx="5367528" cy="3019235"/>
-          </a:xfrm>
-          <a:prstGeom prst="rect">
-            <a:avLst/>
-          </a:prstGeom>
-          <a:solidFill>
-            <a:schemeClr val="bg2"/>
-          </a:solidFill>
+            <a:off x="548640" y="1600200"/>
+            <a:ext cx="5367528" cy="2674554"/>
+          </a:xfrm>
+          <a:prstGeom prst="rect">
+            <a:avLst/>
+          </a:prstGeom>
           <a:ln w="12700">
             <a:solidFill>
               <a:srgbClr val="D9E1DC"/>
@@ -4032,9 +3942,59 @@
           </a:ln>
         </p:spPr>
       </p:sp>
+      <p:sp>
+        <p:nvSpPr>
+          <p:cNvPr id="5" name="Text 2"/>
+          <p:cNvSpPr txBox="1"/>
+          <p:nvPr/>
+        </p:nvSpPr>
+        <p:spPr>
+          <a:xfrm>
+            <a:off x="548640" y="4802315"/>
+            <a:ext cx="5367528" cy="1005840"/>
+          </a:xfrm>
+          <a:prstGeom prst="rect">
+            <a:avLst/>
+          </a:prstGeom>
+          <a:noFill/>
+          <a:ln/>
+        </p:spPr>
+        <p:txBody>
+          <a:bodyPr wrap="square" lIns="0" tIns="0" rIns="0" bIns="0" rtlCol="0" anchor="t"/>
+          <a:lstStyle/>
+          <a:p>
+            <a:pPr indent="0" marL="0">
+              <a:buNone/>
+            </a:pPr>
+            <a:r>
+              <a:rPr lang="en-US" sz="1600" b="1" dirty="0">
+                <a:solidFill>
+                  <a:schemeClr val="tx2"/>
+                </a:solidFill>
+              </a:rPr>
+              <a:t>Testes</a:t>
+            </a:r>
+            <a:endParaRPr lang="en-US" sz="1400" dirty="0"/>
+          </a:p>
+          <a:p>
+            <a:pPr indent="0" marL="0">
+              <a:buNone/>
+            </a:pPr>
+            <a:r>
+              <a:rPr lang="en-US" sz="1300" dirty="0">
+                <a:solidFill>
+                  <a:schemeClr val="accent5"/>
+                </a:solidFill>
+              </a:rPr>
+              <a:t>Testes unitários e de integração com PostgreSQL, relatório publicado e cobertura (JaCoCo)</a:t>
+            </a:r>
+            <a:endParaRPr lang="en-US" sz="1400" dirty="0"/>
+          </a:p>
+        </p:txBody>
+      </p:sp>
       <p:pic>
         <p:nvPicPr>
-          <p:cNvPr id="7" name="Print: Docker no CI" descr="Docker no CI">    </p:cNvPr>
+          <p:cNvPr id="6" name="Print: Docker no CI" descr="Docker no CI: Build da imagem, Compose com PostgreSQL, smoke tests e publicação no GHCR">    </p:cNvPr>
           <p:cNvPicPr>
             <a:picLocks noChangeAspect="1"/>
           </p:cNvPicPr>
@@ -4048,14 +4008,36 @@
         </p:blipFill>
         <p:spPr>
           <a:xfrm>
-            <a:off x="6272784" y="1645920"/>
-            <a:ext cx="5367528" cy="3019235"/>
+            <a:off x="6272784" y="1600200"/>
+            <a:ext cx="5367528" cy="2773284"/>
           </a:xfrm>
           <a:prstGeom prst="rect">
             <a:avLst/>
           </a:prstGeom>
         </p:spPr>
       </p:pic>
+      <p:sp>
+        <p:nvSpPr>
+          <p:cNvPr id="7" name="Moldura: Docker no CI"/>
+          <p:cNvSpPr/>
+          <p:nvPr/>
+        </p:nvSpPr>
+        <p:spPr>
+          <a:xfrm>
+            <a:off x="6272784" y="1600200"/>
+            <a:ext cx="5367528" cy="2773284"/>
+          </a:xfrm>
+          <a:prstGeom prst="rect">
+            <a:avLst/>
+          </a:prstGeom>
+          <a:ln w="12700">
+            <a:solidFill>
+              <a:srgbClr val="D9E1DC"/>
+            </a:solidFill>
+            <a:prstDash val="solid"/>
+          </a:ln>
+        </p:spPr>
+      </p:sp>
       <p:sp>
         <p:nvSpPr>
           <p:cNvPr id="8" name="Text 4"/>
@@ -4064,7 +4046,7 @@
         </p:nvSpPr>
         <p:spPr>
           <a:xfrm>
-            <a:off x="6272784" y="4848035"/>
+            <a:off x="6272784" y="4802315"/>
             <a:ext cx="5367528" cy="1005840"/>
           </a:xfrm>
           <a:prstGeom prst="rect">
@@ -4100,7 +4082,7 @@
                   <a:schemeClr val="accent5"/>
                 </a:solidFill>
               </a:rPr>
-              <a:t>Build da imagem, Compose com PostgreSQL e smoke tests aprovados</a:t>
+              <a:t>Build da imagem, Compose com PostgreSQL, smoke tests e publicação no GHCR</a:t>
             </a:r>
             <a:endParaRPr lang="en-US" sz="1400" dirty="0"/>
           </a:p>
@@ -4214,34 +4196,9 @@
           </a:p>
         </p:txBody>
       </p:sp>
-      <p:sp>
-        <p:nvSpPr>
-          <p:cNvPr id="3" name="Shape 1"/>
-          <p:cNvSpPr/>
-          <p:nvPr/>
-        </p:nvSpPr>
-        <p:spPr>
-          <a:xfrm>
-            <a:off x="548640" y="1645920"/>
-            <a:ext cx="5367528" cy="3019235"/>
-          </a:xfrm>
-          <a:prstGeom prst="rect">
-            <a:avLst/>
-          </a:prstGeom>
-          <a:solidFill>
-            <a:schemeClr val="bg2"/>
-          </a:solidFill>
-          <a:ln w="12700">
-            <a:solidFill>
-              <a:srgbClr val="D9E1DC"/>
-            </a:solidFill>
-            <a:prstDash val="solid"/>
-          </a:ln>
-        </p:spPr>
-      </p:sp>
       <p:pic>
         <p:nvPicPr>
-          <p:cNvPr id="4" name="Print: Deploy em staging" descr="Deploy em staging">    </p:cNvPr>
+          <p:cNvPr id="3" name="Print: Deploy em staging" descr="Deploy em staging: Deploy no Render com o commit do pipeline e smoke tests de leitura e escrita">    </p:cNvPr>
           <p:cNvPicPr>
             <a:picLocks noChangeAspect="1"/>
           </p:cNvPicPr>
@@ -4255,8 +4212,8 @@
         </p:blipFill>
         <p:spPr>
           <a:xfrm>
-            <a:off x="548640" y="1645920"/>
-            <a:ext cx="5367528" cy="3019235"/>
+            <a:off x="548640" y="1600200"/>
+            <a:ext cx="5367528" cy="2707677"/>
           </a:xfrm>
           <a:prstGeom prst="rect">
             <a:avLst/>
@@ -4265,71 +4222,18 @@
       </p:pic>
       <p:sp>
         <p:nvSpPr>
-          <p:cNvPr id="5" name="Text 2"/>
-          <p:cNvSpPr txBox="1"/>
-          <p:nvPr/>
-        </p:nvSpPr>
-        <p:spPr>
-          <a:xfrm>
-            <a:off x="548640" y="4848035"/>
-            <a:ext cx="5367528" cy="1005840"/>
-          </a:xfrm>
-          <a:prstGeom prst="rect">
-            <a:avLst/>
-          </a:prstGeom>
-          <a:noFill/>
-          <a:ln/>
-        </p:spPr>
-        <p:txBody>
-          <a:bodyPr wrap="square" lIns="0" tIns="0" rIns="0" bIns="0" rtlCol="0" anchor="t"/>
-          <a:lstStyle/>
-          <a:p>
-            <a:pPr indent="0" marL="0">
-              <a:buNone/>
-            </a:pPr>
-            <a:r>
-              <a:rPr lang="en-US" sz="1600" b="1" dirty="0">
-                <a:solidFill>
-                  <a:schemeClr val="tx2"/>
-                </a:solidFill>
-              </a:rPr>
-              <a:t>Deploy em staging</a:t>
-            </a:r>
-            <a:endParaRPr lang="en-US" sz="1400" dirty="0"/>
-          </a:p>
-          <a:p>
-            <a:pPr indent="0" marL="0">
-              <a:buNone/>
-            </a:pPr>
-            <a:r>
-              <a:rPr lang="en-US" sz="1300" dirty="0">
-                <a:solidFill>
-                  <a:schemeClr val="accent5"/>
-                </a:solidFill>
-              </a:rPr>
-              <a:t>Resumo do deploy com o commit publicado e os smoke tests</a:t>
-            </a:r>
-            <a:endParaRPr lang="en-US" sz="1400" dirty="0"/>
-          </a:p>
-        </p:txBody>
-      </p:sp>
-      <p:sp>
-        <p:nvSpPr>
-          <p:cNvPr id="6" name="Shape 3"/>
+          <p:cNvPr id="4" name="Moldura: Deploy em staging"/>
           <p:cNvSpPr/>
           <p:nvPr/>
         </p:nvSpPr>
         <p:spPr>
           <a:xfrm>
-            <a:off x="6272784" y="1645920"/>
-            <a:ext cx="5367528" cy="3019235"/>
-          </a:xfrm>
-          <a:prstGeom prst="rect">
-            <a:avLst/>
-          </a:prstGeom>
-          <a:solidFill>
-            <a:schemeClr val="bg2"/>
-          </a:solidFill>
+            <a:off x="548640" y="1600200"/>
+            <a:ext cx="5367528" cy="2707677"/>
+          </a:xfrm>
+          <a:prstGeom prst="rect">
+            <a:avLst/>
+          </a:prstGeom>
           <a:ln w="12700">
             <a:solidFill>
               <a:srgbClr val="D9E1DC"/>
@@ -4338,9 +4242,59 @@
           </a:ln>
         </p:spPr>
       </p:sp>
+      <p:sp>
+        <p:nvSpPr>
+          <p:cNvPr id="5" name="Text 2"/>
+          <p:cNvSpPr txBox="1"/>
+          <p:nvPr/>
+        </p:nvSpPr>
+        <p:spPr>
+          <a:xfrm>
+            <a:off x="548640" y="4802315"/>
+            <a:ext cx="5367528" cy="1005840"/>
+          </a:xfrm>
+          <a:prstGeom prst="rect">
+            <a:avLst/>
+          </a:prstGeom>
+          <a:noFill/>
+          <a:ln/>
+        </p:spPr>
+        <p:txBody>
+          <a:bodyPr wrap="square" lIns="0" tIns="0" rIns="0" bIns="0" rtlCol="0" anchor="t"/>
+          <a:lstStyle/>
+          <a:p>
+            <a:pPr indent="0" marL="0">
+              <a:buNone/>
+            </a:pPr>
+            <a:r>
+              <a:rPr lang="en-US" sz="1600" b="1" dirty="0">
+                <a:solidFill>
+                  <a:schemeClr val="tx2"/>
+                </a:solidFill>
+              </a:rPr>
+              <a:t>Deploy em staging</a:t>
+            </a:r>
+            <a:endParaRPr lang="en-US" sz="1400" dirty="0"/>
+          </a:p>
+          <a:p>
+            <a:pPr indent="0" marL="0">
+              <a:buNone/>
+            </a:pPr>
+            <a:r>
+              <a:rPr lang="en-US" sz="1300" dirty="0">
+                <a:solidFill>
+                  <a:schemeClr val="accent5"/>
+                </a:solidFill>
+              </a:rPr>
+              <a:t>Deploy no Render com o commit do pipeline e smoke tests de leitura e escrita</a:t>
+            </a:r>
+            <a:endParaRPr lang="en-US" sz="1400" dirty="0"/>
+          </a:p>
+        </p:txBody>
+      </p:sp>
       <p:pic>
         <p:nvPicPr>
-          <p:cNvPr id="7" name="Print: Aprovação" descr="Aprovação">    </p:cNvPr>
+          <p:cNvPr id="6" name="Print: Aprovação" descr="Aprovação: Revisão obrigatória do ambiente production antes do deploy">    </p:cNvPr>
           <p:cNvPicPr>
             <a:picLocks noChangeAspect="1"/>
           </p:cNvPicPr>
@@ -4354,14 +4308,36 @@
         </p:blipFill>
         <p:spPr>
           <a:xfrm>
-            <a:off x="6272784" y="1645920"/>
-            <a:ext cx="5367528" cy="3019235"/>
+            <a:off x="6460647" y="1600200"/>
+            <a:ext cx="4991801" cy="3019235"/>
           </a:xfrm>
           <a:prstGeom prst="rect">
             <a:avLst/>
           </a:prstGeom>
         </p:spPr>
       </p:pic>
+      <p:sp>
+        <p:nvSpPr>
+          <p:cNvPr id="7" name="Moldura: Aprovação"/>
+          <p:cNvSpPr/>
+          <p:nvPr/>
+        </p:nvSpPr>
+        <p:spPr>
+          <a:xfrm>
+            <a:off x="6460647" y="1600200"/>
+            <a:ext cx="4991801" cy="3019235"/>
+          </a:xfrm>
+          <a:prstGeom prst="rect">
+            <a:avLst/>
+          </a:prstGeom>
+          <a:ln w="12700">
+            <a:solidFill>
+              <a:srgbClr val="D9E1DC"/>
+            </a:solidFill>
+            <a:prstDash val="solid"/>
+          </a:ln>
+        </p:spPr>
+      </p:sp>
       <p:sp>
         <p:nvSpPr>
           <p:cNvPr id="8" name="Text 4"/>
@@ -4370,7 +4346,7 @@
         </p:nvSpPr>
         <p:spPr>
           <a:xfrm>
-            <a:off x="6272784" y="4848035"/>
+            <a:off x="6272784" y="4802315"/>
             <a:ext cx="5367528" cy="1005840"/>
           </a:xfrm>
           <a:prstGeom prst="rect">
@@ -4406,7 +4382,7 @@
                   <a:schemeClr val="accent5"/>
                 </a:solidFill>
               </a:rPr>
-              <a:t>Ambiente production aguardando a revisão de um integrante</a:t>
+              <a:t>Revisão obrigatória do ambiente production antes do deploy</a:t>
             </a:r>
             <a:endParaRPr lang="en-US" sz="1400" dirty="0"/>
           </a:p>
@@ -4520,34 +4496,9 @@
           </a:p>
         </p:txBody>
       </p:sp>
-      <p:sp>
-        <p:nvSpPr>
-          <p:cNvPr id="3" name="Shape 1"/>
-          <p:cNvSpPr/>
-          <p:nvPr/>
-        </p:nvSpPr>
-        <p:spPr>
-          <a:xfrm>
-            <a:off x="548640" y="1645920"/>
-            <a:ext cx="5367528" cy="3019235"/>
-          </a:xfrm>
-          <a:prstGeom prst="rect">
-            <a:avLst/>
-          </a:prstGeom>
-          <a:solidFill>
-            <a:schemeClr val="bg2"/>
-          </a:solidFill>
-          <a:ln w="12700">
-            <a:solidFill>
-              <a:srgbClr val="D9E1DC"/>
-            </a:solidFill>
-            <a:prstDash val="solid"/>
-          </a:ln>
-        </p:spPr>
-      </p:sp>
       <p:pic>
         <p:nvPicPr>
-          <p:cNvPr id="4" name="Print: Deploy em produção" descr="Deploy em produção">    </p:cNvPr>
+          <p:cNvPr id="3" name="Print: Deploy em produção" descr="Deploy em produção: O mesmo commit de staging publicado em produção, com smoke tests somente leitura">    </p:cNvPr>
           <p:cNvPicPr>
             <a:picLocks noChangeAspect="1"/>
           </p:cNvPicPr>
@@ -4561,8 +4512,8 @@
         </p:blipFill>
         <p:spPr>
           <a:xfrm>
-            <a:off x="548640" y="1645920"/>
-            <a:ext cx="5367528" cy="3019235"/>
+            <a:off x="548640" y="1600200"/>
+            <a:ext cx="5367528" cy="2707579"/>
           </a:xfrm>
           <a:prstGeom prst="rect">
             <a:avLst/>
@@ -4571,71 +4522,18 @@
       </p:pic>
       <p:sp>
         <p:nvSpPr>
-          <p:cNvPr id="5" name="Text 2"/>
-          <p:cNvSpPr txBox="1"/>
-          <p:nvPr/>
-        </p:nvSpPr>
-        <p:spPr>
-          <a:xfrm>
-            <a:off x="548640" y="4848035"/>
-            <a:ext cx="5367528" cy="1005840"/>
-          </a:xfrm>
-          <a:prstGeom prst="rect">
-            <a:avLst/>
-          </a:prstGeom>
-          <a:noFill/>
-          <a:ln/>
-        </p:spPr>
-        <p:txBody>
-          <a:bodyPr wrap="square" lIns="0" tIns="0" rIns="0" bIns="0" rtlCol="0" anchor="t"/>
-          <a:lstStyle/>
-          <a:p>
-            <a:pPr indent="0" marL="0">
-              <a:buNone/>
-            </a:pPr>
-            <a:r>
-              <a:rPr lang="en-US" sz="1600" b="1" dirty="0">
-                <a:solidFill>
-                  <a:schemeClr val="tx2"/>
-                </a:solidFill>
-              </a:rPr>
-              <a:t>Deploy em produção</a:t>
-            </a:r>
-            <a:endParaRPr lang="en-US" sz="1400" dirty="0"/>
-          </a:p>
-          <a:p>
-            <a:pPr indent="0" marL="0">
-              <a:buNone/>
-            </a:pPr>
-            <a:r>
-              <a:rPr lang="en-US" sz="1300" dirty="0">
-                <a:solidFill>
-                  <a:schemeClr val="accent5"/>
-                </a:solidFill>
-              </a:rPr>
-              <a:t>Mesmo commit de staging publicado e verificado em produção</a:t>
-            </a:r>
-            <a:endParaRPr lang="en-US" sz="1400" dirty="0"/>
-          </a:p>
-        </p:txBody>
-      </p:sp>
-      <p:sp>
-        <p:nvSpPr>
-          <p:cNvPr id="6" name="Shape 3"/>
+          <p:cNvPr id="4" name="Moldura: Deploy em produção"/>
           <p:cNvSpPr/>
           <p:nvPr/>
         </p:nvSpPr>
         <p:spPr>
           <a:xfrm>
-            <a:off x="6272784" y="1645920"/>
-            <a:ext cx="5367528" cy="3019235"/>
-          </a:xfrm>
-          <a:prstGeom prst="rect">
-            <a:avLst/>
-          </a:prstGeom>
-          <a:solidFill>
-            <a:schemeClr val="bg2"/>
-          </a:solidFill>
+            <a:off x="548640" y="1600200"/>
+            <a:ext cx="5367528" cy="2707579"/>
+          </a:xfrm>
+          <a:prstGeom prst="rect">
+            <a:avLst/>
+          </a:prstGeom>
           <a:ln w="12700">
             <a:solidFill>
               <a:srgbClr val="D9E1DC"/>
@@ -4644,9 +4542,59 @@
           </a:ln>
         </p:spPr>
       </p:sp>
+      <p:sp>
+        <p:nvSpPr>
+          <p:cNvPr id="5" name="Text 2"/>
+          <p:cNvSpPr txBox="1"/>
+          <p:nvPr/>
+        </p:nvSpPr>
+        <p:spPr>
+          <a:xfrm>
+            <a:off x="548640" y="4802315"/>
+            <a:ext cx="5367528" cy="1005840"/>
+          </a:xfrm>
+          <a:prstGeom prst="rect">
+            <a:avLst/>
+          </a:prstGeom>
+          <a:noFill/>
+          <a:ln/>
+        </p:spPr>
+        <p:txBody>
+          <a:bodyPr wrap="square" lIns="0" tIns="0" rIns="0" bIns="0" rtlCol="0" anchor="t"/>
+          <a:lstStyle/>
+          <a:p>
+            <a:pPr indent="0" marL="0">
+              <a:buNone/>
+            </a:pPr>
+            <a:r>
+              <a:rPr lang="en-US" sz="1600" b="1" dirty="0">
+                <a:solidFill>
+                  <a:schemeClr val="tx2"/>
+                </a:solidFill>
+              </a:rPr>
+              <a:t>Deploy em produção</a:t>
+            </a:r>
+            <a:endParaRPr lang="en-US" sz="1400" dirty="0"/>
+          </a:p>
+          <a:p>
+            <a:pPr indent="0" marL="0">
+              <a:buNone/>
+            </a:pPr>
+            <a:r>
+              <a:rPr lang="en-US" sz="1300" dirty="0">
+                <a:solidFill>
+                  <a:schemeClr val="accent5"/>
+                </a:solidFill>
+              </a:rPr>
+              <a:t>O mesmo commit de staging publicado em produção, com smoke tests somente leitura</a:t>
+            </a:r>
+            <a:endParaRPr lang="en-US" sz="1400" dirty="0"/>
+          </a:p>
+        </p:txBody>
+      </p:sp>
       <p:pic>
         <p:nvPicPr>
-          <p:cNvPr id="7" name="Print: Imagem no GHCR" descr="Imagem no GHCR">    </p:cNvPr>
+          <p:cNvPr id="6" name="Print: Imagem no GHCR" descr="Imagem no GHCR: ghcr.io/julhaalmeida/cidades-esg-inteligentes, com as tags sha-6677280 e latest">    </p:cNvPr>
           <p:cNvPicPr>
             <a:picLocks noChangeAspect="1"/>
           </p:cNvPicPr>
@@ -4660,14 +4608,36 @@
         </p:blipFill>
         <p:spPr>
           <a:xfrm>
-            <a:off x="6272784" y="1645920"/>
-            <a:ext cx="5367528" cy="3019235"/>
+            <a:off x="6272784" y="1600200"/>
+            <a:ext cx="5367528" cy="2718714"/>
           </a:xfrm>
           <a:prstGeom prst="rect">
             <a:avLst/>
           </a:prstGeom>
         </p:spPr>
       </p:pic>
+      <p:sp>
+        <p:nvSpPr>
+          <p:cNvPr id="7" name="Moldura: Imagem no GHCR"/>
+          <p:cNvSpPr/>
+          <p:nvPr/>
+        </p:nvSpPr>
+        <p:spPr>
+          <a:xfrm>
+            <a:off x="6272784" y="1600200"/>
+            <a:ext cx="5367528" cy="2718714"/>
+          </a:xfrm>
+          <a:prstGeom prst="rect">
+            <a:avLst/>
+          </a:prstGeom>
+          <a:ln w="12700">
+            <a:solidFill>
+              <a:srgbClr val="D9E1DC"/>
+            </a:solidFill>
+            <a:prstDash val="solid"/>
+          </a:ln>
+        </p:spPr>
+      </p:sp>
       <p:sp>
         <p:nvSpPr>
           <p:cNvPr id="8" name="Text 4"/>
@@ -4676,7 +4646,7 @@
         </p:nvSpPr>
         <p:spPr>
           <a:xfrm>
-            <a:off x="6272784" y="4848035"/>
+            <a:off x="6272784" y="4802315"/>
             <a:ext cx="5367528" cy="1005840"/>
           </a:xfrm>
           <a:prstGeom prst="rect">
@@ -4712,7 +4682,7 @@
                   <a:schemeClr val="accent5"/>
                 </a:solidFill>
               </a:rPr>
-              <a:t>Pacote com as tags sha-&lt;commit&gt; e latest</a:t>
+              <a:t>ghcr.io/julhaalmeida/cidades-esg-inteligentes, com as tags sha-6677280 e latest</a:t>
             </a:r>
             <a:endParaRPr lang="en-US" sz="1400" dirty="0"/>
           </a:p>
@@ -4826,34 +4796,9 @@
           </a:p>
         </p:txBody>
       </p:sp>
-      <p:sp>
-        <p:nvSpPr>
-          <p:cNvPr id="3" name="Shape 1"/>
-          <p:cNvSpPr/>
-          <p:nvPr/>
-        </p:nvSpPr>
-        <p:spPr>
-          <a:xfrm>
-            <a:off x="548640" y="1645920"/>
-            <a:ext cx="5367528" cy="3019235"/>
-          </a:xfrm>
-          <a:prstGeom prst="rect">
-            <a:avLst/>
-          </a:prstGeom>
-          <a:solidFill>
-            <a:schemeClr val="bg2"/>
-          </a:solidFill>
-          <a:ln w="12700">
-            <a:solidFill>
-              <a:srgbClr val="D9E1DC"/>
-            </a:solidFill>
-            <a:prstDash val="solid"/>
-          </a:ln>
-        </p:spPr>
-      </p:sp>
       <p:pic>
         <p:nvPicPr>
-          <p:cNvPr id="4" name="Print: Staging" descr="Staging">    </p:cNvPr>
+          <p:cNvPr id="3" name="Print: Staging" descr="Staging: cidades-esg-staging.onrender.com: faixa amarela, versão 1.0.0 e commit 6677280">    </p:cNvPr>
           <p:cNvPicPr>
             <a:picLocks noChangeAspect="1"/>
           </p:cNvPicPr>
@@ -4867,8 +4812,8 @@
         </p:blipFill>
         <p:spPr>
           <a:xfrm>
-            <a:off x="548640" y="1645920"/>
-            <a:ext cx="5367528" cy="3019235"/>
+            <a:off x="548640" y="1600200"/>
+            <a:ext cx="5367528" cy="2756891"/>
           </a:xfrm>
           <a:prstGeom prst="rect">
             <a:avLst/>
@@ -4877,71 +4822,18 @@
       </p:pic>
       <p:sp>
         <p:nvSpPr>
-          <p:cNvPr id="5" name="Text 2"/>
-          <p:cNvSpPr txBox="1"/>
-          <p:nvPr/>
-        </p:nvSpPr>
-        <p:spPr>
-          <a:xfrm>
-            <a:off x="548640" y="4848035"/>
-            <a:ext cx="5367528" cy="1005840"/>
-          </a:xfrm>
-          <a:prstGeom prst="rect">
-            <a:avLst/>
-          </a:prstGeom>
-          <a:noFill/>
-          <a:ln/>
-        </p:spPr>
-        <p:txBody>
-          <a:bodyPr wrap="square" lIns="0" tIns="0" rIns="0" bIns="0" rtlCol="0" anchor="t"/>
-          <a:lstStyle/>
-          <a:p>
-            <a:pPr indent="0" marL="0">
-              <a:buNone/>
-            </a:pPr>
-            <a:r>
-              <a:rPr lang="en-US" sz="1600" b="1" dirty="0">
-                <a:solidFill>
-                  <a:schemeClr val="tx2"/>
-                </a:solidFill>
-              </a:rPr>
-              <a:t>Staging</a:t>
-            </a:r>
-            <a:endParaRPr lang="en-US" sz="1400" dirty="0"/>
-          </a:p>
-          <a:p>
-            <a:pPr indent="0" marL="0">
-              <a:buNone/>
-            </a:pPr>
-            <a:r>
-              <a:rPr lang="en-US" sz="1300" dirty="0">
-                <a:solidFill>
-                  <a:schemeClr val="accent5"/>
-                </a:solidFill>
-              </a:rPr>
-              <a:t>Página inicial no Render: faixa amarela, versão e commit</a:t>
-            </a:r>
-            <a:endParaRPr lang="en-US" sz="1400" dirty="0"/>
-          </a:p>
-        </p:txBody>
-      </p:sp>
-      <p:sp>
-        <p:nvSpPr>
-          <p:cNvPr id="6" name="Shape 3"/>
+          <p:cNvPr id="4" name="Moldura: Staging"/>
           <p:cNvSpPr/>
           <p:nvPr/>
         </p:nvSpPr>
         <p:spPr>
           <a:xfrm>
-            <a:off x="6272784" y="1645920"/>
-            <a:ext cx="5367528" cy="3019235"/>
-          </a:xfrm>
-          <a:prstGeom prst="rect">
-            <a:avLst/>
-          </a:prstGeom>
-          <a:solidFill>
-            <a:schemeClr val="bg2"/>
-          </a:solidFill>
+            <a:off x="548640" y="1600200"/>
+            <a:ext cx="5367528" cy="2756891"/>
+          </a:xfrm>
+          <a:prstGeom prst="rect">
+            <a:avLst/>
+          </a:prstGeom>
           <a:ln w="12700">
             <a:solidFill>
               <a:srgbClr val="D9E1DC"/>
@@ -4950,9 +4842,59 @@
           </a:ln>
         </p:spPr>
       </p:sp>
+      <p:sp>
+        <p:nvSpPr>
+          <p:cNvPr id="5" name="Text 2"/>
+          <p:cNvSpPr txBox="1"/>
+          <p:nvPr/>
+        </p:nvSpPr>
+        <p:spPr>
+          <a:xfrm>
+            <a:off x="548640" y="4802315"/>
+            <a:ext cx="5367528" cy="1005840"/>
+          </a:xfrm>
+          <a:prstGeom prst="rect">
+            <a:avLst/>
+          </a:prstGeom>
+          <a:noFill/>
+          <a:ln/>
+        </p:spPr>
+        <p:txBody>
+          <a:bodyPr wrap="square" lIns="0" tIns="0" rIns="0" bIns="0" rtlCol="0" anchor="t"/>
+          <a:lstStyle/>
+          <a:p>
+            <a:pPr indent="0" marL="0">
+              <a:buNone/>
+            </a:pPr>
+            <a:r>
+              <a:rPr lang="en-US" sz="1600" b="1" dirty="0">
+                <a:solidFill>
+                  <a:schemeClr val="tx2"/>
+                </a:solidFill>
+              </a:rPr>
+              <a:t>Staging</a:t>
+            </a:r>
+            <a:endParaRPr lang="en-US" sz="1400" dirty="0"/>
+          </a:p>
+          <a:p>
+            <a:pPr indent="0" marL="0">
+              <a:buNone/>
+            </a:pPr>
+            <a:r>
+              <a:rPr lang="en-US" sz="1300" dirty="0">
+                <a:solidFill>
+                  <a:schemeClr val="accent5"/>
+                </a:solidFill>
+              </a:rPr>
+              <a:t>cidades-esg-staging.onrender.com: faixa amarela, versão 1.0.0 e commit 6677280</a:t>
+            </a:r>
+            <a:endParaRPr lang="en-US" sz="1400" dirty="0"/>
+          </a:p>
+        </p:txBody>
+      </p:sp>
       <p:pic>
         <p:nvPicPr>
-          <p:cNvPr id="7" name="Print: Produção" descr="Produção">    </p:cNvPr>
+          <p:cNvPr id="6" name="Print: Produção" descr="Produção: cidades-esg-production.onrender.com: faixa verde e o mesmo commit 6677280">    </p:cNvPr>
           <p:cNvPicPr>
             <a:picLocks noChangeAspect="1"/>
           </p:cNvPicPr>
@@ -4966,14 +4908,36 @@
         </p:blipFill>
         <p:spPr>
           <a:xfrm>
-            <a:off x="6272784" y="1645920"/>
-            <a:ext cx="5367528" cy="3019235"/>
+            <a:off x="6272784" y="1600200"/>
+            <a:ext cx="5367528" cy="2747969"/>
           </a:xfrm>
           <a:prstGeom prst="rect">
             <a:avLst/>
           </a:prstGeom>
         </p:spPr>
       </p:pic>
+      <p:sp>
+        <p:nvSpPr>
+          <p:cNvPr id="7" name="Moldura: Produção"/>
+          <p:cNvSpPr/>
+          <p:nvPr/>
+        </p:nvSpPr>
+        <p:spPr>
+          <a:xfrm>
+            <a:off x="6272784" y="1600200"/>
+            <a:ext cx="5367528" cy="2747969"/>
+          </a:xfrm>
+          <a:prstGeom prst="rect">
+            <a:avLst/>
+          </a:prstGeom>
+          <a:ln w="12700">
+            <a:solidFill>
+              <a:srgbClr val="D9E1DC"/>
+            </a:solidFill>
+            <a:prstDash val="solid"/>
+          </a:ln>
+        </p:spPr>
+      </p:sp>
       <p:sp>
         <p:nvSpPr>
           <p:cNvPr id="8" name="Text 4"/>
@@ -4982,7 +4946,7 @@
         </p:nvSpPr>
         <p:spPr>
           <a:xfrm>
-            <a:off x="6272784" y="4848035"/>
+            <a:off x="6272784" y="4802315"/>
             <a:ext cx="5367528" cy="1005840"/>
           </a:xfrm>
           <a:prstGeom prst="rect">
@@ -5018,7 +4982,7 @@
                   <a:schemeClr val="accent5"/>
                 </a:solidFill>
               </a:rPr>
-              <a:t>Página inicial no Render: faixa verde, versão e commit</a:t>
+              <a:t>cidades-esg-production.onrender.com: faixa verde e o mesmo commit 6677280</a:t>
             </a:r>
             <a:endParaRPr lang="en-US" sz="1400" dirty="0"/>
           </a:p>
@@ -5126,40 +5090,15 @@
                   <a:schemeClr val="tx2"/>
                 </a:solidFill>
               </a:rPr>
-              <a:t>Infraestrutura no Render e execução local</a:t>
+              <a:t>Infraestrutura no Render e Docker Compose</a:t>
             </a:r>
             <a:endParaRPr lang="en-US" sz="3000" dirty="0"/>
           </a:p>
         </p:txBody>
-      </p:sp>
-      <p:sp>
-        <p:nvSpPr>
-          <p:cNvPr id="3" name="Shape 1"/>
-          <p:cNvSpPr/>
-          <p:nvPr/>
-        </p:nvSpPr>
-        <p:spPr>
-          <a:xfrm>
-            <a:off x="548640" y="1645920"/>
-            <a:ext cx="5367528" cy="3019235"/>
-          </a:xfrm>
-          <a:prstGeom prst="rect">
-            <a:avLst/>
-          </a:prstGeom>
-          <a:solidFill>
-            <a:schemeClr val="bg2"/>
-          </a:solidFill>
-          <a:ln w="12700">
-            <a:solidFill>
-              <a:srgbClr val="D9E1DC"/>
-            </a:solidFill>
-            <a:prstDash val="solid"/>
-          </a:ln>
-        </p:spPr>
       </p:sp>
       <p:pic>
         <p:nvPicPr>
-          <p:cNvPr id="4" name="Print: Render" descr="Render">    </p:cNvPr>
+          <p:cNvPr id="3" name="Print: Render" descr="Render: Serviços Docker de staging e produção e o banco PostgreSQL 17, criados pelo render.yaml">    </p:cNvPr>
           <p:cNvPicPr>
             <a:picLocks noChangeAspect="1"/>
           </p:cNvPicPr>
@@ -5173,8 +5112,8 @@
         </p:blipFill>
         <p:spPr>
           <a:xfrm>
-            <a:off x="548640" y="1645920"/>
-            <a:ext cx="5367528" cy="3019235"/>
+            <a:off x="548640" y="1600200"/>
+            <a:ext cx="5367528" cy="2689260"/>
           </a:xfrm>
           <a:prstGeom prst="rect">
             <a:avLst/>
@@ -5183,71 +5122,18 @@
       </p:pic>
       <p:sp>
         <p:nvSpPr>
-          <p:cNvPr id="5" name="Text 2"/>
-          <p:cNvSpPr txBox="1"/>
-          <p:nvPr/>
-        </p:nvSpPr>
-        <p:spPr>
-          <a:xfrm>
-            <a:off x="548640" y="4848035"/>
-            <a:ext cx="5367528" cy="1005840"/>
-          </a:xfrm>
-          <a:prstGeom prst="rect">
-            <a:avLst/>
-          </a:prstGeom>
-          <a:noFill/>
-          <a:ln/>
-        </p:spPr>
-        <p:txBody>
-          <a:bodyPr wrap="square" lIns="0" tIns="0" rIns="0" bIns="0" rtlCol="0" anchor="t"/>
-          <a:lstStyle/>
-          <a:p>
-            <a:pPr indent="0" marL="0">
-              <a:buNone/>
-            </a:pPr>
-            <a:r>
-              <a:rPr lang="en-US" sz="1600" b="1" dirty="0">
-                <a:solidFill>
-                  <a:schemeClr val="tx2"/>
-                </a:solidFill>
-              </a:rPr>
-              <a:t>Render</a:t>
-            </a:r>
-            <a:endParaRPr lang="en-US" sz="1400" dirty="0"/>
-          </a:p>
-          <a:p>
-            <a:pPr indent="0" marL="0">
-              <a:buNone/>
-            </a:pPr>
-            <a:r>
-              <a:rPr lang="en-US" sz="1300" dirty="0">
-                <a:solidFill>
-                  <a:schemeClr val="accent5"/>
-                </a:solidFill>
-              </a:rPr>
-              <a:t>Serviços de staging e produção e o banco PostgreSQL</a:t>
-            </a:r>
-            <a:endParaRPr lang="en-US" sz="1400" dirty="0"/>
-          </a:p>
-        </p:txBody>
-      </p:sp>
-      <p:sp>
-        <p:nvSpPr>
-          <p:cNvPr id="6" name="Shape 3"/>
+          <p:cNvPr id="4" name="Moldura: Render"/>
           <p:cNvSpPr/>
           <p:nvPr/>
         </p:nvSpPr>
         <p:spPr>
           <a:xfrm>
-            <a:off x="6272784" y="1645920"/>
-            <a:ext cx="5367528" cy="3019235"/>
-          </a:xfrm>
-          <a:prstGeom prst="rect">
-            <a:avLst/>
-          </a:prstGeom>
-          <a:solidFill>
-            <a:schemeClr val="bg2"/>
-          </a:solidFill>
+            <a:off x="548640" y="1600200"/>
+            <a:ext cx="5367528" cy="2689260"/>
+          </a:xfrm>
+          <a:prstGeom prst="rect">
+            <a:avLst/>
+          </a:prstGeom>
           <a:ln w="12700">
             <a:solidFill>
               <a:srgbClr val="D9E1DC"/>
@@ -5256,9 +5142,59 @@
           </a:ln>
         </p:spPr>
       </p:sp>
+      <p:sp>
+        <p:nvSpPr>
+          <p:cNvPr id="5" name="Text 2"/>
+          <p:cNvSpPr txBox="1"/>
+          <p:nvPr/>
+        </p:nvSpPr>
+        <p:spPr>
+          <a:xfrm>
+            <a:off x="548640" y="4802315"/>
+            <a:ext cx="5367528" cy="1005840"/>
+          </a:xfrm>
+          <a:prstGeom prst="rect">
+            <a:avLst/>
+          </a:prstGeom>
+          <a:noFill/>
+          <a:ln/>
+        </p:spPr>
+        <p:txBody>
+          <a:bodyPr wrap="square" lIns="0" tIns="0" rIns="0" bIns="0" rtlCol="0" anchor="t"/>
+          <a:lstStyle/>
+          <a:p>
+            <a:pPr indent="0" marL="0">
+              <a:buNone/>
+            </a:pPr>
+            <a:r>
+              <a:rPr lang="en-US" sz="1600" b="1" dirty="0">
+                <a:solidFill>
+                  <a:schemeClr val="tx2"/>
+                </a:solidFill>
+              </a:rPr>
+              <a:t>Render</a:t>
+            </a:r>
+            <a:endParaRPr lang="en-US" sz="1400" dirty="0"/>
+          </a:p>
+          <a:p>
+            <a:pPr indent="0" marL="0">
+              <a:buNone/>
+            </a:pPr>
+            <a:r>
+              <a:rPr lang="en-US" sz="1300" dirty="0">
+                <a:solidFill>
+                  <a:schemeClr val="accent5"/>
+                </a:solidFill>
+              </a:rPr>
+              <a:t>Serviços Docker de staging e produção e o banco PostgreSQL 17, criados pelo render.yaml</a:t>
+            </a:r>
+            <a:endParaRPr lang="en-US" sz="1400" dirty="0"/>
+          </a:p>
+        </p:txBody>
+      </p:sp>
       <p:pic>
         <p:nvPicPr>
-          <p:cNvPr id="7" name="Print: Docker Compose local" descr="Docker Compose local">    </p:cNvPr>
+          <p:cNvPr id="6" name="Print: Docker Compose" descr="Docker Compose: No pipeline: redes frontend e backend, volumes pgdata e app-logs e containers saudáveis">    </p:cNvPr>
           <p:cNvPicPr>
             <a:picLocks noChangeAspect="1"/>
           </p:cNvPicPr>
@@ -5272,14 +5208,36 @@
         </p:blipFill>
         <p:spPr>
           <a:xfrm>
-            <a:off x="6272784" y="1645920"/>
-            <a:ext cx="5367528" cy="3019235"/>
+            <a:off x="6272784" y="1600200"/>
+            <a:ext cx="5367528" cy="2746263"/>
           </a:xfrm>
           <a:prstGeom prst="rect">
             <a:avLst/>
           </a:prstGeom>
         </p:spPr>
       </p:pic>
+      <p:sp>
+        <p:nvSpPr>
+          <p:cNvPr id="7" name="Moldura: Docker Compose"/>
+          <p:cNvSpPr/>
+          <p:nvPr/>
+        </p:nvSpPr>
+        <p:spPr>
+          <a:xfrm>
+            <a:off x="6272784" y="1600200"/>
+            <a:ext cx="5367528" cy="2746263"/>
+          </a:xfrm>
+          <a:prstGeom prst="rect">
+            <a:avLst/>
+          </a:prstGeom>
+          <a:ln w="12700">
+            <a:solidFill>
+              <a:srgbClr val="D9E1DC"/>
+            </a:solidFill>
+            <a:prstDash val="solid"/>
+          </a:ln>
+        </p:spPr>
+      </p:sp>
       <p:sp>
         <p:nvSpPr>
           <p:cNvPr id="8" name="Text 4"/>
@@ -5288,7 +5246,7 @@
         </p:nvSpPr>
         <p:spPr>
           <a:xfrm>
-            <a:off x="6272784" y="4848035"/>
+            <a:off x="6272784" y="4802315"/>
             <a:ext cx="5367528" cy="1005840"/>
           </a:xfrm>
           <a:prstGeom prst="rect">
@@ -5310,7 +5268,7 @@
                   <a:schemeClr val="tx2"/>
                 </a:solidFill>
               </a:rPr>
-              <a:t>Docker Compose local</a:t>
+              <a:t>Docker Compose</a:t>
             </a:r>
             <a:endParaRPr lang="en-US" sz="1400" dirty="0"/>
           </a:p>
@@ -5324,7 +5282,7 @@
                   <a:schemeClr val="accent5"/>
                 </a:solidFill>
               </a:rPr>
-              <a:t>docker compose ps com app e db saudáveis</a:t>
+              <a:t>No pipeline: redes frontend e backend, volumes pgdata e app-logs e containers saudáveis</a:t>
             </a:r>
             <a:endParaRPr lang="en-US" sz="1400" dirty="0"/>
           </a:p>
@@ -5728,7 +5686,7 @@
                   <a:schemeClr val="tx1"/>
                 </a:solidFill>
               </a:rPr>
-              <a:t>O mesmo commit vai para os dois deploy hooks (ref=&lt;sha&gt;).</a:t>
+              <a:t>O mesmo commit vai para os dois deploy hooks (ref=&lt;sha&gt;) e é conferido em /api/info.</a:t>
             </a:r>
             <a:endParaRPr lang="en-US" sz="1500" dirty="0"/>
           </a:p>
@@ -5763,7 +5721,7 @@
       </p:sp>
       <p:sp>
         <p:nvSpPr>
-          <p:cNvPr id="14" name="Saber quando o deploy terminou"/>
+          <p:cNvPr id="14" name="Commit não chegava no Render"/>
           <p:cNvSpPr/>
           <p:nvPr/>
         </p:nvSpPr>
@@ -5788,7 +5746,7 @@
       </p:sp>
       <p:pic>
         <p:nvPicPr>
-          <p:cNvPr id="15" name="Saber quando o deploy terminou (ícone)" descr="preencoded.png">    </p:cNvPr>
+          <p:cNvPr id="15" name="Commit não chegava no Render (ícone)" descr="preencoded.png">    </p:cNvPr>
           <p:cNvPicPr>
             <a:picLocks noChangeAspect="1"/>
           </p:cNvPicPr>
@@ -5840,7 +5798,7 @@
                   <a:schemeClr val="tx2"/>
                 </a:solidFill>
               </a:rPr>
-              <a:t>Saber quando o deploy terminou</a:t>
+              <a:t>Commit não chegava no Render</a:t>
             </a:r>
             <a:endParaRPr lang="en-US" sz="1550" dirty="0"/>
           </a:p>
@@ -5876,7 +5834,7 @@
                   <a:schemeClr val="tx1"/>
                 </a:solidFill>
               </a:rPr>
-              <a:t>O pipeline consulta /api/info até o commit novo responder, com tempo limite.</a:t>
+              <a:t>O Render só repassa o commit para ARGs declarados. Declaramos ARG RENDER_GIT_COMMIT no Dockerfile.</a:t>
             </a:r>
             <a:endParaRPr lang="en-US" sz="1500" dirty="0"/>
           </a:p>
@@ -7743,7 +7701,7 @@
         <p:spPr>
           <a:xfrm>
             <a:off x="1554480" y="1810512"/>
-            <a:ext cx="6858000" cy="777240"/>
+            <a:ext cx="6949440" cy="777240"/>
           </a:xfrm>
           <a:prstGeom prst="rect">
             <a:avLst/>
@@ -7761,27 +7719,34 @@
             <a:r>
               <a:rPr lang="en-US" sz="1800" b="1" dirty="0">
                 <a:solidFill>
+                  <a:schemeClr val="bg1"/>
+                </a:solidFill>
+              </a:rPr>
+              <a:t>Repositório</a:t>
+            </a:r>
+            <a:endParaRPr lang="en-US" sz="1400" dirty="0"/>
+          </a:p>
+          <a:p>
+            <a:pPr indent="0" marL="0">
+              <a:buNone/>
+            </a:pPr>
+            <a:r>
+              <a:rPr lang="en-US" sz="1400" u="sng" dirty="0">
+                <a:solidFill>
                   <a:schemeClr val="accent4"/>
-                </a:solidFill>
-              </a:rPr>
-              <a:t>Repositório</a:t>
-            </a:r>
-            <a:endParaRPr lang="en-US" sz="1400" dirty="0"/>
-          </a:p>
-          <a:p>
-            <a:pPr indent="0" marL="0">
-              <a:buNone/>
-            </a:pPr>
-            <a:r>
-              <a:rPr lang="en-US" sz="1500" dirty="0">
-                <a:solidFill>
-                  <a:schemeClr val="bg1"/>
                 </a:solidFill>
                 <a:latin typeface="Courier New" pitchFamily="34" charset="0"/>
                 <a:ea typeface="Courier New" pitchFamily="34" charset="-122"/>
                 <a:cs typeface="Courier New" pitchFamily="34" charset="-120"/>
-              </a:rPr>
-              <a:t>https://github.com/[PREENCHER]</a:t>
+                <a:hlinkClick r:id="rId2" invalidUrl="" action="" tgtFrame="" tooltip="Abrir Repositório" history="1" highlightClick="0" endSnd="0">
+                  <a:extLst>
+                    <a:ext uri="{A12FA001-AC4F-418D-AE19-62706E023703}">
+                      <ahyp:hlinkClr xmlns:ahyp="http://schemas.microsoft.com/office/drawing/2018/hyperlinkcolor" val="tx"/>
+                    </a:ext>
+                  </a:extLst>
+                </a:hlinkClick>
+              </a:rPr>
+              <a:t>https://github.com/Julhaalmeida/cidades-esg-inteligentes</a:t>
             </a:r>
             <a:endParaRPr lang="en-US" sz="1400" dirty="0"/>
           </a:p>
@@ -7821,7 +7786,7 @@
           <p:nvPr/>
         </p:nvPicPr>
         <p:blipFill>
-          <a:blip r:embed="rId2"/>
+          <a:blip r:embed="rId3"/>
           <a:stretch>
             <a:fillRect/>
           </a:stretch>
@@ -7845,7 +7810,7 @@
         <p:spPr>
           <a:xfrm>
             <a:off x="1554480" y="2770632"/>
-            <a:ext cx="6858000" cy="777240"/>
+            <a:ext cx="6949440" cy="777240"/>
           </a:xfrm>
           <a:prstGeom prst="rect">
             <a:avLst/>
@@ -7863,27 +7828,34 @@
             <a:r>
               <a:rPr lang="en-US" sz="1800" b="1" dirty="0">
                 <a:solidFill>
+                  <a:schemeClr val="bg1"/>
+                </a:solidFill>
+              </a:rPr>
+              <a:t>Staging</a:t>
+            </a:r>
+            <a:endParaRPr lang="en-US" sz="1400" dirty="0"/>
+          </a:p>
+          <a:p>
+            <a:pPr indent="0" marL="0">
+              <a:buNone/>
+            </a:pPr>
+            <a:r>
+              <a:rPr lang="en-US" sz="1400" u="sng" dirty="0">
+                <a:solidFill>
                   <a:schemeClr val="accent4"/>
-                </a:solidFill>
-              </a:rPr>
-              <a:t>Staging</a:t>
-            </a:r>
-            <a:endParaRPr lang="en-US" sz="1400" dirty="0"/>
-          </a:p>
-          <a:p>
-            <a:pPr indent="0" marL="0">
-              <a:buNone/>
-            </a:pPr>
-            <a:r>
-              <a:rPr lang="en-US" sz="1500" dirty="0">
-                <a:solidFill>
-                  <a:schemeClr val="bg1"/>
                 </a:solidFill>
                 <a:latin typeface="Courier New" pitchFamily="34" charset="0"/>
                 <a:ea typeface="Courier New" pitchFamily="34" charset="-122"/>
                 <a:cs typeface="Courier New" pitchFamily="34" charset="-120"/>
-              </a:rPr>
-              <a:t>https://[PREENCHER].onrender.com</a:t>
+                <a:hlinkClick r:id="rId4" invalidUrl="" action="" tgtFrame="" tooltip="Abrir Staging" history="1" highlightClick="0" endSnd="0">
+                  <a:extLst>
+                    <a:ext uri="{A12FA001-AC4F-418D-AE19-62706E023703}">
+                      <ahyp:hlinkClr xmlns:ahyp="http://schemas.microsoft.com/office/drawing/2018/hyperlinkcolor" val="tx"/>
+                    </a:ext>
+                  </a:extLst>
+                </a:hlinkClick>
+              </a:rPr>
+              <a:t>https://cidades-esg-staging.onrender.com</a:t>
             </a:r>
             <a:endParaRPr lang="en-US" sz="1400" dirty="0"/>
           </a:p>
@@ -7923,7 +7895,7 @@
           <p:nvPr/>
         </p:nvPicPr>
         <p:blipFill>
-          <a:blip r:embed="rId3"/>
+          <a:blip r:embed="rId5"/>
           <a:stretch>
             <a:fillRect/>
           </a:stretch>
@@ -7947,7 +7919,7 @@
         <p:spPr>
           <a:xfrm>
             <a:off x="1554480" y="3730752"/>
-            <a:ext cx="6858000" cy="777240"/>
+            <a:ext cx="6949440" cy="777240"/>
           </a:xfrm>
           <a:prstGeom prst="rect">
             <a:avLst/>
@@ -7965,27 +7937,34 @@
             <a:r>
               <a:rPr lang="en-US" sz="1800" b="1" dirty="0">
                 <a:solidFill>
+                  <a:schemeClr val="bg1"/>
+                </a:solidFill>
+              </a:rPr>
+              <a:t>Produção</a:t>
+            </a:r>
+            <a:endParaRPr lang="en-US" sz="1400" dirty="0"/>
+          </a:p>
+          <a:p>
+            <a:pPr indent="0" marL="0">
+              <a:buNone/>
+            </a:pPr>
+            <a:r>
+              <a:rPr lang="en-US" sz="1400" u="sng" dirty="0">
+                <a:solidFill>
                   <a:schemeClr val="accent4"/>
-                </a:solidFill>
-              </a:rPr>
-              <a:t>Produção</a:t>
-            </a:r>
-            <a:endParaRPr lang="en-US" sz="1400" dirty="0"/>
-          </a:p>
-          <a:p>
-            <a:pPr indent="0" marL="0">
-              <a:buNone/>
-            </a:pPr>
-            <a:r>
-              <a:rPr lang="en-US" sz="1500" dirty="0">
-                <a:solidFill>
-                  <a:schemeClr val="bg1"/>
                 </a:solidFill>
                 <a:latin typeface="Courier New" pitchFamily="34" charset="0"/>
                 <a:ea typeface="Courier New" pitchFamily="34" charset="-122"/>
                 <a:cs typeface="Courier New" pitchFamily="34" charset="-120"/>
-              </a:rPr>
-              <a:t>https://[PREENCHER].onrender.com</a:t>
+                <a:hlinkClick r:id="rId6" invalidUrl="" action="" tgtFrame="" tooltip="Abrir Produção" history="1" highlightClick="0" endSnd="0">
+                  <a:extLst>
+                    <a:ext uri="{A12FA001-AC4F-418D-AE19-62706E023703}">
+                      <ahyp:hlinkClr xmlns:ahyp="http://schemas.microsoft.com/office/drawing/2018/hyperlinkcolor" val="tx"/>
+                    </a:ext>
+                  </a:extLst>
+                </a:hlinkClick>
+              </a:rPr>
+              <a:t>https://cidades-esg-production.onrender.com</a:t>
             </a:r>
             <a:endParaRPr lang="en-US" sz="1400" dirty="0"/>
           </a:p>
@@ -7993,7 +7972,7 @@
       </p:sp>
       <p:sp>
         <p:nvSpPr>
-          <p:cNvPr id="12" name="Swagger"/>
+          <p:cNvPr id="12" name="Swagger (produção)"/>
           <p:cNvSpPr/>
           <p:nvPr/>
         </p:nvSpPr>
@@ -8018,14 +7997,14 @@
       </p:sp>
       <p:pic>
         <p:nvPicPr>
-          <p:cNvPr id="13" name="Swagger (ícone)" descr="preencoded.png">    </p:cNvPr>
+          <p:cNvPr id="13" name="Swagger (produção) (ícone)" descr="preencoded.png">    </p:cNvPr>
           <p:cNvPicPr>
             <a:picLocks noChangeAspect="1"/>
           </p:cNvPicPr>
           <p:nvPr/>
         </p:nvPicPr>
         <p:blipFill>
-          <a:blip r:embed="rId4"/>
+          <a:blip r:embed="rId7"/>
           <a:stretch>
             <a:fillRect/>
           </a:stretch>
@@ -8049,7 +8028,7 @@
         <p:spPr>
           <a:xfrm>
             <a:off x="1554480" y="4690872"/>
-            <a:ext cx="6858000" cy="777240"/>
+            <a:ext cx="6949440" cy="777240"/>
           </a:xfrm>
           <a:prstGeom prst="rect">
             <a:avLst/>
@@ -8067,27 +8046,34 @@
             <a:r>
               <a:rPr lang="en-US" sz="1800" b="1" dirty="0">
                 <a:solidFill>
+                  <a:schemeClr val="bg1"/>
+                </a:solidFill>
+              </a:rPr>
+              <a:t>Swagger (produção)</a:t>
+            </a:r>
+            <a:endParaRPr lang="en-US" sz="1400" dirty="0"/>
+          </a:p>
+          <a:p>
+            <a:pPr indent="0" marL="0">
+              <a:buNone/>
+            </a:pPr>
+            <a:r>
+              <a:rPr lang="en-US" sz="1400" u="sng" dirty="0">
+                <a:solidFill>
                   <a:schemeClr val="accent4"/>
-                </a:solidFill>
-              </a:rPr>
-              <a:t>Swagger</a:t>
-            </a:r>
-            <a:endParaRPr lang="en-US" sz="1400" dirty="0"/>
-          </a:p>
-          <a:p>
-            <a:pPr indent="0" marL="0">
-              <a:buNone/>
-            </a:pPr>
-            <a:r>
-              <a:rPr lang="en-US" sz="1500" dirty="0">
-                <a:solidFill>
-                  <a:schemeClr val="bg1"/>
                 </a:solidFill>
                 <a:latin typeface="Courier New" pitchFamily="34" charset="0"/>
                 <a:ea typeface="Courier New" pitchFamily="34" charset="-122"/>
                 <a:cs typeface="Courier New" pitchFamily="34" charset="-120"/>
-              </a:rPr>
-              <a:t>&lt;url-do-ambiente&gt;/swagger-ui.html</a:t>
+                <a:hlinkClick r:id="rId8" invalidUrl="" action="" tgtFrame="" tooltip="Abrir Swagger (produção)" history="1" highlightClick="0" endSnd="0">
+                  <a:extLst>
+                    <a:ext uri="{A12FA001-AC4F-418D-AE19-62706E023703}">
+                      <ahyp:hlinkClr xmlns:ahyp="http://schemas.microsoft.com/office/drawing/2018/hyperlinkcolor" val="tx"/>
+                    </a:ext>
+                  </a:extLst>
+                </a:hlinkClick>
+              </a:rPr>
+              <a:t>https://cidades-esg-production.onrender.com/swagger-ui.html</a:t>
             </a:r>
             <a:endParaRPr lang="en-US" sz="1400" dirty="0"/>
           </a:p>
@@ -16520,7 +16506,27 @@
                 <a:ea typeface="Courier New" pitchFamily="34" charset="-122"/>
                 <a:cs typeface="Courier New" pitchFamily="34" charset="-120"/>
               </a:rPr>
-              <a:t>ghcr.io/&lt;usuario&gt;/&lt;repositorio&gt;</a:t>
+              <a:t>ghcr.io/julhaalmeida/</a:t>
+            </a:r>
+            <a:endParaRPr lang="en-US" sz="1350" dirty="0"/>
+          </a:p>
+          <a:p>
+            <a:pPr indent="0" marL="0">
+              <a:spcAft>
+                <a:spcPts val="300"/>
+              </a:spcAft>
+              <a:buNone/>
+            </a:pPr>
+            <a:r>
+              <a:rPr lang="en-US" sz="1200" dirty="0">
+                <a:solidFill>
+                  <a:schemeClr val="tx1"/>
+                </a:solidFill>
+                <a:latin typeface="Courier New" pitchFamily="34" charset="0"/>
+                <a:ea typeface="Courier New" pitchFamily="34" charset="-122"/>
+                <a:cs typeface="Courier New" pitchFamily="34" charset="-120"/>
+              </a:rPr>
+              <a:t>cidades-esg-inteligentes</a:t>
             </a:r>
             <a:endParaRPr lang="en-US" sz="1350" dirty="0"/>
           </a:p>
@@ -16753,10 +16759,10 @@
         <a:srgbClr val="D9E1DC"/>
       </a:accent6>
       <a:hlink>
-        <a:srgbClr val="2F62B3"/>
+        <a:srgbClr val="F2B632"/>
       </a:hlink>
       <a:folHlink>
-        <a:srgbClr val="4A5852"/>
+        <a:srgbClr val="D9E1DC"/>
       </a:folHlink>
     </a:clrScheme>
     <a:fontScheme name="Cidades ESG">
